--- a/psc203a-data-WQ26/images/top-banners.pptx
+++ b/psc203a-data-WQ26/images/top-banners.pptx
@@ -14,15 +14,16 @@
     <p:sldId id="263" r:id="rId8"/>
     <p:sldId id="275" r:id="rId9"/>
     <p:sldId id="276" r:id="rId10"/>
-    <p:sldId id="264" r:id="rId11"/>
-    <p:sldId id="271" r:id="rId12"/>
-    <p:sldId id="265" r:id="rId13"/>
-    <p:sldId id="266" r:id="rId14"/>
-    <p:sldId id="267" r:id="rId15"/>
-    <p:sldId id="268" r:id="rId16"/>
-    <p:sldId id="272" r:id="rId17"/>
-    <p:sldId id="273" r:id="rId18"/>
-    <p:sldId id="274" r:id="rId19"/>
+    <p:sldId id="277" r:id="rId11"/>
+    <p:sldId id="264" r:id="rId12"/>
+    <p:sldId id="271" r:id="rId13"/>
+    <p:sldId id="265" r:id="rId14"/>
+    <p:sldId id="266" r:id="rId15"/>
+    <p:sldId id="267" r:id="rId16"/>
+    <p:sldId id="268" r:id="rId17"/>
+    <p:sldId id="272" r:id="rId18"/>
+    <p:sldId id="273" r:id="rId19"/>
+    <p:sldId id="274" r:id="rId20"/>
   </p:sldIdLst>
   <p:sldSz cx="12192000" cy="6858000"/>
   <p:notesSz cx="6858000" cy="9144000"/>
@@ -135,6 +136,7 @@
             <p14:sldId id="263"/>
             <p14:sldId id="275"/>
             <p14:sldId id="276"/>
+            <p14:sldId id="277"/>
           </p14:sldIdLst>
         </p14:section>
         <p14:section name="smaller" id="{808A3871-69ED-7649-961A-C1C71F122AE6}">
@@ -290,7 +292,7 @@
           <a:p>
             <a:fld id="{5765A0DD-D146-AB41-9E7C-B1AE1956131A}" type="datetimeFigureOut">
               <a:rPr lang="en-US" smtClean="0"/>
-              <a:t>1/31/26</a:t>
+              <a:t>2/7/26</a:t>
             </a:fld>
             <a:endParaRPr lang="en-US"/>
           </a:p>
@@ -460,7 +462,7 @@
           <a:p>
             <a:fld id="{5765A0DD-D146-AB41-9E7C-B1AE1956131A}" type="datetimeFigureOut">
               <a:rPr lang="en-US" smtClean="0"/>
-              <a:t>1/31/26</a:t>
+              <a:t>2/7/26</a:t>
             </a:fld>
             <a:endParaRPr lang="en-US"/>
           </a:p>
@@ -640,7 +642,7 @@
           <a:p>
             <a:fld id="{5765A0DD-D146-AB41-9E7C-B1AE1956131A}" type="datetimeFigureOut">
               <a:rPr lang="en-US" smtClean="0"/>
-              <a:t>1/31/26</a:t>
+              <a:t>2/7/26</a:t>
             </a:fld>
             <a:endParaRPr lang="en-US"/>
           </a:p>
@@ -810,7 +812,7 @@
           <a:p>
             <a:fld id="{5765A0DD-D146-AB41-9E7C-B1AE1956131A}" type="datetimeFigureOut">
               <a:rPr lang="en-US" smtClean="0"/>
-              <a:t>1/31/26</a:t>
+              <a:t>2/7/26</a:t>
             </a:fld>
             <a:endParaRPr lang="en-US"/>
           </a:p>
@@ -1056,7 +1058,7 @@
           <a:p>
             <a:fld id="{5765A0DD-D146-AB41-9E7C-B1AE1956131A}" type="datetimeFigureOut">
               <a:rPr lang="en-US" smtClean="0"/>
-              <a:t>1/31/26</a:t>
+              <a:t>2/7/26</a:t>
             </a:fld>
             <a:endParaRPr lang="en-US"/>
           </a:p>
@@ -1288,7 +1290,7 @@
           <a:p>
             <a:fld id="{5765A0DD-D146-AB41-9E7C-B1AE1956131A}" type="datetimeFigureOut">
               <a:rPr lang="en-US" smtClean="0"/>
-              <a:t>1/31/26</a:t>
+              <a:t>2/7/26</a:t>
             </a:fld>
             <a:endParaRPr lang="en-US"/>
           </a:p>
@@ -1655,7 +1657,7 @@
           <a:p>
             <a:fld id="{5765A0DD-D146-AB41-9E7C-B1AE1956131A}" type="datetimeFigureOut">
               <a:rPr lang="en-US" smtClean="0"/>
-              <a:t>1/31/26</a:t>
+              <a:t>2/7/26</a:t>
             </a:fld>
             <a:endParaRPr lang="en-US"/>
           </a:p>
@@ -1773,7 +1775,7 @@
           <a:p>
             <a:fld id="{5765A0DD-D146-AB41-9E7C-B1AE1956131A}" type="datetimeFigureOut">
               <a:rPr lang="en-US" smtClean="0"/>
-              <a:t>1/31/26</a:t>
+              <a:t>2/7/26</a:t>
             </a:fld>
             <a:endParaRPr lang="en-US"/>
           </a:p>
@@ -1868,7 +1870,7 @@
           <a:p>
             <a:fld id="{5765A0DD-D146-AB41-9E7C-B1AE1956131A}" type="datetimeFigureOut">
               <a:rPr lang="en-US" smtClean="0"/>
-              <a:t>1/31/26</a:t>
+              <a:t>2/7/26</a:t>
             </a:fld>
             <a:endParaRPr lang="en-US"/>
           </a:p>
@@ -2145,7 +2147,7 @@
           <a:p>
             <a:fld id="{5765A0DD-D146-AB41-9E7C-B1AE1956131A}" type="datetimeFigureOut">
               <a:rPr lang="en-US" smtClean="0"/>
-              <a:t>1/31/26</a:t>
+              <a:t>2/7/26</a:t>
             </a:fld>
             <a:endParaRPr lang="en-US"/>
           </a:p>
@@ -2402,7 +2404,7 @@
           <a:p>
             <a:fld id="{5765A0DD-D146-AB41-9E7C-B1AE1956131A}" type="datetimeFigureOut">
               <a:rPr lang="en-US" smtClean="0"/>
-              <a:t>1/31/26</a:t>
+              <a:t>2/7/26</a:t>
             </a:fld>
             <a:endParaRPr lang="en-US"/>
           </a:p>
@@ -2615,7 +2617,7 @@
           <a:p>
             <a:fld id="{5765A0DD-D146-AB41-9E7C-B1AE1956131A}" type="datetimeFigureOut">
               <a:rPr lang="en-US" smtClean="0"/>
-              <a:t>1/31/26</a:t>
+              <a:t>2/7/26</a:t>
             </a:fld>
             <a:endParaRPr lang="en-US"/>
           </a:p>
@@ -3151,6 +3153,146 @@
         <p:cNvPr id="1" name="">
           <a:extLst>
             <a:ext uri="{FF2B5EF4-FFF2-40B4-BE49-F238E27FC236}">
+              <a16:creationId xmlns:a16="http://schemas.microsoft.com/office/drawing/2014/main" id="{CDA4329A-4DBB-60A7-326F-1B184A7D17D3}"/>
+            </a:ext>
+          </a:extLst>
+        </p:cNvPr>
+        <p:cNvGrpSpPr/>
+        <p:nvPr/>
+      </p:nvGrpSpPr>
+      <p:grpSpPr>
+        <a:xfrm>
+          <a:off x="0" y="0"/>
+          <a:ext cx="0" cy="0"/>
+          <a:chOff x="0" y="0"/>
+          <a:chExt cx="0" cy="0"/>
+        </a:xfrm>
+      </p:grpSpPr>
+      <p:sp>
+        <p:nvSpPr>
+          <p:cNvPr id="4" name="Rectangle 3">
+            <a:extLst>
+              <a:ext uri="{FF2B5EF4-FFF2-40B4-BE49-F238E27FC236}">
+                <a16:creationId xmlns:a16="http://schemas.microsoft.com/office/drawing/2014/main" id="{329AD964-4DCE-F8B6-04E8-D75E1C3BB7F9}"/>
+              </a:ext>
+            </a:extLst>
+          </p:cNvPr>
+          <p:cNvSpPr/>
+          <p:nvPr/>
+        </p:nvSpPr>
+        <p:spPr>
+          <a:xfrm>
+            <a:off x="0" y="-1"/>
+            <a:ext cx="12192000" cy="8319543"/>
+          </a:xfrm>
+          <a:prstGeom prst="rect">
+            <a:avLst/>
+          </a:prstGeom>
+          <a:solidFill>
+            <a:schemeClr val="bg1"/>
+          </a:solidFill>
+          <a:ln>
+            <a:noFill/>
+          </a:ln>
+        </p:spPr>
+        <p:style>
+          <a:lnRef idx="2">
+            <a:schemeClr val="accent1">
+              <a:shade val="15000"/>
+            </a:schemeClr>
+          </a:lnRef>
+          <a:fillRef idx="1">
+            <a:schemeClr val="accent1"/>
+          </a:fillRef>
+          <a:effectRef idx="0">
+            <a:schemeClr val="accent1"/>
+          </a:effectRef>
+          <a:fontRef idx="minor">
+            <a:schemeClr val="lt1"/>
+          </a:fontRef>
+        </p:style>
+        <p:txBody>
+          <a:bodyPr rtlCol="0" anchor="ctr"/>
+          <a:lstStyle/>
+          <a:p>
+            <a:pPr algn="ctr"/>
+            <a:endParaRPr lang="en-US"/>
+          </a:p>
+        </p:txBody>
+      </p:sp>
+      <p:sp>
+        <p:nvSpPr>
+          <p:cNvPr id="5" name="Rectangle 4">
+            <a:extLst>
+              <a:ext uri="{FF2B5EF4-FFF2-40B4-BE49-F238E27FC236}">
+                <a16:creationId xmlns:a16="http://schemas.microsoft.com/office/drawing/2014/main" id="{7A3233D4-56AE-A540-35BB-42A4D961A3B8}"/>
+              </a:ext>
+            </a:extLst>
+          </p:cNvPr>
+          <p:cNvSpPr/>
+          <p:nvPr/>
+        </p:nvSpPr>
+        <p:spPr>
+          <a:xfrm>
+            <a:off x="0" y="-1"/>
+            <a:ext cx="12192000" cy="2100943"/>
+          </a:xfrm>
+          <a:prstGeom prst="rect">
+            <a:avLst/>
+          </a:prstGeom>
+          <a:solidFill>
+            <a:srgbClr val="00649A"/>
+          </a:solidFill>
+          <a:ln>
+            <a:noFill/>
+          </a:ln>
+        </p:spPr>
+        <p:style>
+          <a:lnRef idx="2">
+            <a:schemeClr val="accent1">
+              <a:shade val="15000"/>
+            </a:schemeClr>
+          </a:lnRef>
+          <a:fillRef idx="1">
+            <a:schemeClr val="accent1"/>
+          </a:fillRef>
+          <a:effectRef idx="0">
+            <a:schemeClr val="accent1"/>
+          </a:effectRef>
+          <a:fontRef idx="minor">
+            <a:schemeClr val="lt1"/>
+          </a:fontRef>
+        </p:style>
+        <p:txBody>
+          <a:bodyPr rtlCol="0" anchor="ctr"/>
+          <a:lstStyle/>
+          <a:p>
+            <a:pPr algn="ctr"/>
+            <a:endParaRPr lang="en-US"/>
+          </a:p>
+        </p:txBody>
+      </p:sp>
+    </p:spTree>
+    <p:extLst>
+      <p:ext uri="{BB962C8B-B14F-4D97-AF65-F5344CB8AC3E}">
+        <p14:creationId xmlns:p14="http://schemas.microsoft.com/office/powerpoint/2010/main" val="564821001"/>
+      </p:ext>
+    </p:extLst>
+  </p:cSld>
+  <p:clrMapOvr>
+    <a:masterClrMapping/>
+  </p:clrMapOvr>
+</p:sld>
+</file>
+
+<file path=ppt/slides/slide11.xml><?xml version="1.0" encoding="utf-8"?>
+<p:sld xmlns:a="http://schemas.openxmlformats.org/drawingml/2006/main" xmlns:r="http://schemas.openxmlformats.org/officeDocument/2006/relationships" xmlns:p="http://schemas.openxmlformats.org/presentationml/2006/main">
+  <p:cSld>
+    <p:spTree>
+      <p:nvGrpSpPr>
+        <p:cNvPr id="1" name="">
+          <a:extLst>
+            <a:ext uri="{FF2B5EF4-FFF2-40B4-BE49-F238E27FC236}">
               <a16:creationId xmlns:a16="http://schemas.microsoft.com/office/drawing/2014/main" id="{9DB2F621-CE2D-BD14-98EB-6A7D989837BB}"/>
             </a:ext>
           </a:extLst>
@@ -3283,7 +3425,7 @@
 </p:sld>
 </file>
 
-<file path=ppt/slides/slide11.xml><?xml version="1.0" encoding="utf-8"?>
+<file path=ppt/slides/slide12.xml><?xml version="1.0" encoding="utf-8"?>
 <p:sld xmlns:a="http://schemas.openxmlformats.org/drawingml/2006/main" xmlns:r="http://schemas.openxmlformats.org/officeDocument/2006/relationships" xmlns:p="http://schemas.openxmlformats.org/presentationml/2006/main">
   <p:cSld>
     <p:spTree>
@@ -3423,7 +3565,7 @@
 </p:sld>
 </file>
 
-<file path=ppt/slides/slide12.xml><?xml version="1.0" encoding="utf-8"?>
+<file path=ppt/slides/slide13.xml><?xml version="1.0" encoding="utf-8"?>
 <p:sld xmlns:a="http://schemas.openxmlformats.org/drawingml/2006/main" xmlns:r="http://schemas.openxmlformats.org/officeDocument/2006/relationships" xmlns:p="http://schemas.openxmlformats.org/presentationml/2006/main">
   <p:cSld>
     <p:spTree>
@@ -3563,7 +3705,7 @@
 </p:sld>
 </file>
 
-<file path=ppt/slides/slide13.xml><?xml version="1.0" encoding="utf-8"?>
+<file path=ppt/slides/slide14.xml><?xml version="1.0" encoding="utf-8"?>
 <p:sld xmlns:a="http://schemas.openxmlformats.org/drawingml/2006/main" xmlns:r="http://schemas.openxmlformats.org/officeDocument/2006/relationships" xmlns:p="http://schemas.openxmlformats.org/presentationml/2006/main">
   <p:cSld>
     <p:spTree>
@@ -3703,7 +3845,7 @@
 </p:sld>
 </file>
 
-<file path=ppt/slides/slide14.xml><?xml version="1.0" encoding="utf-8"?>
+<file path=ppt/slides/slide15.xml><?xml version="1.0" encoding="utf-8"?>
 <p:sld xmlns:a="http://schemas.openxmlformats.org/drawingml/2006/main" xmlns:r="http://schemas.openxmlformats.org/officeDocument/2006/relationships" xmlns:p="http://schemas.openxmlformats.org/presentationml/2006/main">
   <p:cSld>
     <p:spTree>
@@ -3843,7 +3985,7 @@
 </p:sld>
 </file>
 
-<file path=ppt/slides/slide15.xml><?xml version="1.0" encoding="utf-8"?>
+<file path=ppt/slides/slide16.xml><?xml version="1.0" encoding="utf-8"?>
 <p:sld xmlns:a="http://schemas.openxmlformats.org/drawingml/2006/main" xmlns:r="http://schemas.openxmlformats.org/officeDocument/2006/relationships" xmlns:p="http://schemas.openxmlformats.org/presentationml/2006/main">
   <p:cSld>
     <p:spTree>
@@ -3983,7 +4125,7 @@
 </p:sld>
 </file>
 
-<file path=ppt/slides/slide16.xml><?xml version="1.0" encoding="utf-8"?>
+<file path=ppt/slides/slide17.xml><?xml version="1.0" encoding="utf-8"?>
 <p:sld xmlns:a="http://schemas.openxmlformats.org/drawingml/2006/main" xmlns:r="http://schemas.openxmlformats.org/officeDocument/2006/relationships" xmlns:p="http://schemas.openxmlformats.org/presentationml/2006/main">
   <p:cSld>
     <p:spTree>
@@ -4123,7 +4265,7 @@
 </p:sld>
 </file>
 
-<file path=ppt/slides/slide17.xml><?xml version="1.0" encoding="utf-8"?>
+<file path=ppt/slides/slide18.xml><?xml version="1.0" encoding="utf-8"?>
 <p:sld xmlns:a="http://schemas.openxmlformats.org/drawingml/2006/main" xmlns:r="http://schemas.openxmlformats.org/officeDocument/2006/relationships" xmlns:p="http://schemas.openxmlformats.org/presentationml/2006/main">
   <p:cSld>
     <p:spTree>
@@ -4263,7 +4405,7 @@
 </p:sld>
 </file>
 
-<file path=ppt/slides/slide18.xml><?xml version="1.0" encoding="utf-8"?>
+<file path=ppt/slides/slide19.xml><?xml version="1.0" encoding="utf-8"?>
 <p:sld xmlns:a="http://schemas.openxmlformats.org/drawingml/2006/main" xmlns:r="http://schemas.openxmlformats.org/officeDocument/2006/relationships" xmlns:p="http://schemas.openxmlformats.org/presentationml/2006/main">
   <p:cSld>
     <p:spTree>
